--- a/Poster.pptx
+++ b/Poster.pptx
@@ -3426,7 +3426,7 @@
         </p:nvSpPr>
         <p:spPr>
           <a:xfrm>
-            <a:off x="5131636" y="17966451"/>
+            <a:off x="5124743" y="18069334"/>
             <a:ext cx="13142494" cy="2800767"/>
           </a:xfrm>
           <a:prstGeom prst="rect">
@@ -4157,19 +4157,7 @@
               <a:rPr lang="en-GB" sz="2800" dirty="0">
                 <a:latin typeface="Quicksand" pitchFamily="2" charset="0"/>
               </a:rPr>
-              <a:t> which allow them to perform the duties of </a:t>
-            </a:r>
-            <a:r>
-              <a:rPr lang="en-GB" sz="2800">
-                <a:latin typeface="Quicksand" pitchFamily="2" charset="0"/>
-              </a:rPr>
-              <a:t>their role; </a:t>
-            </a:r>
-            <a:r>
-              <a:rPr lang="en-GB" sz="2800" dirty="0">
-                <a:latin typeface="Quicksand" pitchFamily="2" charset="0"/>
-              </a:rPr>
-              <a:t>Records Officers can </a:t>
+              <a:t> which allow them to perform the duties of their role; Records Officers can </a:t>
             </a:r>
             <a:r>
               <a:rPr lang="en-GB" sz="2800" b="1" dirty="0">
@@ -4360,7 +4348,7 @@
         <p:spPr>
           <a:xfrm>
             <a:off x="20539317" y="12579401"/>
-            <a:ext cx="8225840" cy="3108543"/>
+            <a:ext cx="8225840" cy="3539430"/>
           </a:xfrm>
           <a:prstGeom prst="rect">
             <a:avLst/>
@@ -4378,7 +4366,7 @@
               <a:rPr lang="en-GB" sz="2800" dirty="0">
                 <a:latin typeface="Quicksand" pitchFamily="2" charset="0"/>
               </a:rPr>
-              <a:t>The system uses a Full-stack </a:t>
+              <a:t>The system utilises a full-stack </a:t>
             </a:r>
             <a:r>
               <a:rPr lang="en-GB" sz="2800" b="1" dirty="0">
@@ -4402,7 +4390,7 @@
               <a:rPr lang="en-GB" sz="2800" dirty="0">
                 <a:latin typeface="Quicksand" pitchFamily="2" charset="0"/>
               </a:rPr>
-              <a:t>, and </a:t>
+              <a:t> for type-safe data models. </a:t>
             </a:r>
             <a:r>
               <a:rPr lang="en-GB" sz="2800" b="1" dirty="0">
@@ -4414,7 +4402,7 @@
               <a:rPr lang="en-GB" sz="2800" dirty="0">
                 <a:latin typeface="Quicksand" pitchFamily="2" charset="0"/>
               </a:rPr>
-              <a:t> for containerisation between the frontend, backend, database and a </a:t>
+              <a:t> is used to containerise and orchestrate communications between the frontend, backend, database and a </a:t>
             </a:r>
             <a:r>
               <a:rPr lang="en-GB" sz="2800" b="1" dirty="0">
@@ -4426,7 +4414,7 @@
               <a:rPr lang="en-GB" sz="2800" dirty="0">
                 <a:latin typeface="Quicksand" pitchFamily="2" charset="0"/>
               </a:rPr>
-              <a:t> container running the </a:t>
+              <a:t> microservice container, running the </a:t>
             </a:r>
             <a:r>
               <a:rPr lang="en-GB" sz="2800" b="1" dirty="0">
@@ -4438,7 +4426,7 @@
               <a:rPr lang="en-GB" sz="2800" dirty="0">
                 <a:latin typeface="Quicksand" pitchFamily="2" charset="0"/>
               </a:rPr>
-              <a:t> library to handle automated score classifications and handicapping.</a:t>
+              <a:t> library to handle the automated classification assignments and handicapping.</a:t>
             </a:r>
           </a:p>
         </p:txBody>
@@ -5491,16 +5479,16 @@
 <file path=customXml/itemProps3.xml><?xml version="1.0" encoding="utf-8"?>
 <ds:datastoreItem xmlns:ds="http://schemas.openxmlformats.org/officeDocument/2006/customXml" ds:itemID="{48338919-CAB7-4AC9-BE2B-610C7C37C733}">
   <ds:schemaRefs>
-    <ds:schemaRef ds:uri="dc781de3-bafc-4db7-a392-5d8a9e9bc0f5"/>
+    <ds:schemaRef ds:uri="http://purl.org/dc/dcmitype/"/>
+    <ds:schemaRef ds:uri="http://schemas.microsoft.com/office/infopath/2007/PartnerControls"/>
+    <ds:schemaRef ds:uri="http://purl.org/dc/elements/1.1/"/>
+    <ds:schemaRef ds:uri="http://schemas.microsoft.com/office/2006/documentManagement/types"/>
     <ds:schemaRef ds:uri="http://purl.org/dc/terms/"/>
     <ds:schemaRef ds:uri="http://schemas.openxmlformats.org/package/2006/metadata/core-properties"/>
-    <ds:schemaRef ds:uri="http://purl.org/dc/elements/1.1/"/>
-    <ds:schemaRef ds:uri="http://schemas.microsoft.com/office/2006/documentManagement/types"/>
-    <ds:schemaRef ds:uri="http://schemas.microsoft.com/office/infopath/2007/PartnerControls"/>
+    <ds:schemaRef ds:uri="dc781de3-bafc-4db7-a392-5d8a9e9bc0f5"/>
     <ds:schemaRef ds:uri="72339acb-e8cc-4142-9dab-9dca3e7dada8"/>
     <ds:schemaRef ds:uri="http://schemas.microsoft.com/office/2006/metadata/properties"/>
     <ds:schemaRef ds:uri="http://www.w3.org/XML/1998/namespace"/>
-    <ds:schemaRef ds:uri="http://purl.org/dc/dcmitype/"/>
   </ds:schemaRefs>
 </ds:datastoreItem>
 </file>